--- a/粵語詩歌/誰能使我與神的愛隔絕 (粵語).pptx
+++ b/粵語詩歌/誰能使我與神的愛隔絕 (粵語).pptx
@@ -301,7 +301,7 @@
           <a:p>
             <a:fld id="{A6A23CE9-6925-450D-83BB-532BB1B49E73}" type="datetimeFigureOut">
               <a:rPr lang="vi-VN" smtClean="0"/>
-              <a:t>13/09/2025</a:t>
+              <a:t>20/06/2026</a:t>
             </a:fld>
             <a:endParaRPr lang="vi-VN"/>
           </a:p>
@@ -471,7 +471,7 @@
           <a:p>
             <a:fld id="{A6A23CE9-6925-450D-83BB-532BB1B49E73}" type="datetimeFigureOut">
               <a:rPr lang="vi-VN" smtClean="0"/>
-              <a:t>13/09/2025</a:t>
+              <a:t>20/06/2026</a:t>
             </a:fld>
             <a:endParaRPr lang="vi-VN"/>
           </a:p>
@@ -651,7 +651,7 @@
           <a:p>
             <a:fld id="{A6A23CE9-6925-450D-83BB-532BB1B49E73}" type="datetimeFigureOut">
               <a:rPr lang="vi-VN" smtClean="0"/>
-              <a:t>13/09/2025</a:t>
+              <a:t>20/06/2026</a:t>
             </a:fld>
             <a:endParaRPr lang="vi-VN"/>
           </a:p>
@@ -821,7 +821,7 @@
           <a:p>
             <a:fld id="{A6A23CE9-6925-450D-83BB-532BB1B49E73}" type="datetimeFigureOut">
               <a:rPr lang="vi-VN" smtClean="0"/>
-              <a:t>13/09/2025</a:t>
+              <a:t>20/06/2026</a:t>
             </a:fld>
             <a:endParaRPr lang="vi-VN"/>
           </a:p>
@@ -1067,7 +1067,7 @@
           <a:p>
             <a:fld id="{A6A23CE9-6925-450D-83BB-532BB1B49E73}" type="datetimeFigureOut">
               <a:rPr lang="vi-VN" smtClean="0"/>
-              <a:t>13/09/2025</a:t>
+              <a:t>20/06/2026</a:t>
             </a:fld>
             <a:endParaRPr lang="vi-VN"/>
           </a:p>
@@ -1355,7 +1355,7 @@
           <a:p>
             <a:fld id="{A6A23CE9-6925-450D-83BB-532BB1B49E73}" type="datetimeFigureOut">
               <a:rPr lang="vi-VN" smtClean="0"/>
-              <a:t>13/09/2025</a:t>
+              <a:t>20/06/2026</a:t>
             </a:fld>
             <a:endParaRPr lang="vi-VN"/>
           </a:p>
@@ -1777,7 +1777,7 @@
           <a:p>
             <a:fld id="{A6A23CE9-6925-450D-83BB-532BB1B49E73}" type="datetimeFigureOut">
               <a:rPr lang="vi-VN" smtClean="0"/>
-              <a:t>13/09/2025</a:t>
+              <a:t>20/06/2026</a:t>
             </a:fld>
             <a:endParaRPr lang="vi-VN"/>
           </a:p>
@@ -1895,7 +1895,7 @@
           <a:p>
             <a:fld id="{A6A23CE9-6925-450D-83BB-532BB1B49E73}" type="datetimeFigureOut">
               <a:rPr lang="vi-VN" smtClean="0"/>
-              <a:t>13/09/2025</a:t>
+              <a:t>20/06/2026</a:t>
             </a:fld>
             <a:endParaRPr lang="vi-VN"/>
           </a:p>
@@ -1990,7 +1990,7 @@
           <a:p>
             <a:fld id="{A6A23CE9-6925-450D-83BB-532BB1B49E73}" type="datetimeFigureOut">
               <a:rPr lang="vi-VN" smtClean="0"/>
-              <a:t>13/09/2025</a:t>
+              <a:t>20/06/2026</a:t>
             </a:fld>
             <a:endParaRPr lang="vi-VN"/>
           </a:p>
@@ -2267,7 +2267,7 @@
           <a:p>
             <a:fld id="{A6A23CE9-6925-450D-83BB-532BB1B49E73}" type="datetimeFigureOut">
               <a:rPr lang="vi-VN" smtClean="0"/>
-              <a:t>13/09/2025</a:t>
+              <a:t>20/06/2026</a:t>
             </a:fld>
             <a:endParaRPr lang="vi-VN"/>
           </a:p>
@@ -2524,7 +2524,7 @@
           <a:p>
             <a:fld id="{A6A23CE9-6925-450D-83BB-532BB1B49E73}" type="datetimeFigureOut">
               <a:rPr lang="vi-VN" smtClean="0"/>
-              <a:t>13/09/2025</a:t>
+              <a:t>20/06/2026</a:t>
             </a:fld>
             <a:endParaRPr lang="vi-VN"/>
           </a:p>
@@ -2740,7 +2740,7 @@
           <a:p>
             <a:fld id="{A6A23CE9-6925-450D-83BB-532BB1B49E73}" type="datetimeFigureOut">
               <a:rPr lang="vi-VN" smtClean="0"/>
-              <a:t>13/09/2025</a:t>
+              <a:t>20/06/2026</a:t>
             </a:fld>
             <a:endParaRPr lang="vi-VN"/>
           </a:p>
@@ -4389,7 +4389,6 @@
                 <a:solidFill>
                   <a:srgbClr val="000066"/>
                 </a:solidFill>
-                <a:effectLst/>
                 <a:latin typeface="Microsoft JhengHei" panose="020B0604030504040204" pitchFamily="34" charset="-120"/>
                 <a:ea typeface="Microsoft JhengHei" panose="020B0604030504040204" pitchFamily="34" charset="-120"/>
               </a:rPr>
@@ -4400,18 +4399,16 @@
                 <a:solidFill>
                   <a:srgbClr val="000066"/>
                 </a:solidFill>
-                <a:effectLst/>
                 <a:latin typeface="Microsoft JhengHei" panose="020B0604030504040204" pitchFamily="34" charset="-120"/>
                 <a:ea typeface="Microsoft JhengHei" panose="020B0604030504040204" pitchFamily="34" charset="-120"/>
               </a:rPr>
-              <a:t>副</a:t>
+              <a:t>副歌</a:t>
             </a:r>
             <a:r>
               <a:rPr lang="en-US" sz="4400" b="1" dirty="0">
                 <a:solidFill>
                   <a:srgbClr val="000066"/>
                 </a:solidFill>
-                <a:effectLst/>
                 <a:latin typeface="Microsoft JhengHei" panose="020B0604030504040204" pitchFamily="34" charset="-120"/>
                 <a:ea typeface="Microsoft JhengHei" panose="020B0604030504040204" pitchFamily="34" charset="-120"/>
               </a:rPr>
@@ -4421,7 +4418,6 @@
               <a:solidFill>
                 <a:srgbClr val="000066"/>
               </a:solidFill>
-              <a:effectLst/>
               <a:ea typeface="Microsoft JhengHei" panose="020B0604030504040204" pitchFamily="34" charset="-120"/>
             </a:endParaRPr>
           </a:p>
